--- a/flow chart.pptx
+++ b/flow chart.pptx
@@ -104,6 +104,11 @@
       </a:defRPr>
     </a:lvl9pPr>
   </p:defaultTextStyle>
+  <p:extLst>
+    <p:ext uri="{EFAFB233-063F-42B5-8137-9DF3F51BA10A}">
+      <p15:sldGuideLst xmlns:p15="http://schemas.microsoft.com/office/powerpoint/2012/main"/>
+    </p:ext>
+  </p:extLst>
 </p:presentation>
 </file>
 
@@ -254,7 +259,7 @@
           <a:p>
             <a:fld id="{25EE5148-9BC4-47A1-B3FE-6572D9C2D769}" type="datetimeFigureOut">
               <a:rPr lang="zh-TW" altLang="en-US" smtClean="0"/>
-              <a:t>2026/10/7</a:t>
+              <a:t>2026/10/8</a:t>
             </a:fld>
             <a:endParaRPr lang="zh-TW" altLang="en-US"/>
           </a:p>
@@ -452,7 +457,7 @@
           <a:p>
             <a:fld id="{25EE5148-9BC4-47A1-B3FE-6572D9C2D769}" type="datetimeFigureOut">
               <a:rPr lang="zh-TW" altLang="en-US" smtClean="0"/>
-              <a:t>2026/10/7</a:t>
+              <a:t>2026/10/8</a:t>
             </a:fld>
             <a:endParaRPr lang="zh-TW" altLang="en-US"/>
           </a:p>
@@ -660,7 +665,7 @@
           <a:p>
             <a:fld id="{25EE5148-9BC4-47A1-B3FE-6572D9C2D769}" type="datetimeFigureOut">
               <a:rPr lang="zh-TW" altLang="en-US" smtClean="0"/>
-              <a:t>2026/10/7</a:t>
+              <a:t>2026/10/8</a:t>
             </a:fld>
             <a:endParaRPr lang="zh-TW" altLang="en-US"/>
           </a:p>
@@ -858,7 +863,7 @@
           <a:p>
             <a:fld id="{25EE5148-9BC4-47A1-B3FE-6572D9C2D769}" type="datetimeFigureOut">
               <a:rPr lang="zh-TW" altLang="en-US" smtClean="0"/>
-              <a:t>2026/10/7</a:t>
+              <a:t>2026/10/8</a:t>
             </a:fld>
             <a:endParaRPr lang="zh-TW" altLang="en-US"/>
           </a:p>
@@ -1133,7 +1138,7 @@
           <a:p>
             <a:fld id="{25EE5148-9BC4-47A1-B3FE-6572D9C2D769}" type="datetimeFigureOut">
               <a:rPr lang="zh-TW" altLang="en-US" smtClean="0"/>
-              <a:t>2026/10/7</a:t>
+              <a:t>2026/10/8</a:t>
             </a:fld>
             <a:endParaRPr lang="zh-TW" altLang="en-US"/>
           </a:p>
@@ -1398,7 +1403,7 @@
           <a:p>
             <a:fld id="{25EE5148-9BC4-47A1-B3FE-6572D9C2D769}" type="datetimeFigureOut">
               <a:rPr lang="zh-TW" altLang="en-US" smtClean="0"/>
-              <a:t>2026/10/7</a:t>
+              <a:t>2026/10/8</a:t>
             </a:fld>
             <a:endParaRPr lang="zh-TW" altLang="en-US"/>
           </a:p>
@@ -1810,7 +1815,7 @@
           <a:p>
             <a:fld id="{25EE5148-9BC4-47A1-B3FE-6572D9C2D769}" type="datetimeFigureOut">
               <a:rPr lang="zh-TW" altLang="en-US" smtClean="0"/>
-              <a:t>2026/10/7</a:t>
+              <a:t>2026/10/8</a:t>
             </a:fld>
             <a:endParaRPr lang="zh-TW" altLang="en-US"/>
           </a:p>
@@ -1951,7 +1956,7 @@
           <a:p>
             <a:fld id="{25EE5148-9BC4-47A1-B3FE-6572D9C2D769}" type="datetimeFigureOut">
               <a:rPr lang="zh-TW" altLang="en-US" smtClean="0"/>
-              <a:t>2026/10/7</a:t>
+              <a:t>2026/10/8</a:t>
             </a:fld>
             <a:endParaRPr lang="zh-TW" altLang="en-US"/>
           </a:p>
@@ -2064,7 +2069,7 @@
           <a:p>
             <a:fld id="{25EE5148-9BC4-47A1-B3FE-6572D9C2D769}" type="datetimeFigureOut">
               <a:rPr lang="zh-TW" altLang="en-US" smtClean="0"/>
-              <a:t>2026/10/7</a:t>
+              <a:t>2026/10/8</a:t>
             </a:fld>
             <a:endParaRPr lang="zh-TW" altLang="en-US"/>
           </a:p>
@@ -2375,7 +2380,7 @@
           <a:p>
             <a:fld id="{25EE5148-9BC4-47A1-B3FE-6572D9C2D769}" type="datetimeFigureOut">
               <a:rPr lang="zh-TW" altLang="en-US" smtClean="0"/>
-              <a:t>2026/10/7</a:t>
+              <a:t>2026/10/8</a:t>
             </a:fld>
             <a:endParaRPr lang="zh-TW" altLang="en-US"/>
           </a:p>
@@ -2663,7 +2668,7 @@
           <a:p>
             <a:fld id="{25EE5148-9BC4-47A1-B3FE-6572D9C2D769}" type="datetimeFigureOut">
               <a:rPr lang="zh-TW" altLang="en-US" smtClean="0"/>
-              <a:t>2026/10/7</a:t>
+              <a:t>2026/10/8</a:t>
             </a:fld>
             <a:endParaRPr lang="zh-TW" altLang="en-US"/>
           </a:p>
@@ -2904,7 +2909,7 @@
           <a:p>
             <a:fld id="{25EE5148-9BC4-47A1-B3FE-6572D9C2D769}" type="datetimeFigureOut">
               <a:rPr lang="zh-TW" altLang="en-US" smtClean="0"/>
-              <a:t>2026/10/7</a:t>
+              <a:t>2026/10/8</a:t>
             </a:fld>
             <a:endParaRPr lang="zh-TW" altLang="en-US"/>
           </a:p>
@@ -3323,10 +3328,10 @@
       </p:grpSpPr>
       <p:sp>
         <p:nvSpPr>
-          <p:cNvPr id="4" name="流程圖: 程序 3">
-            <a:extLst>
-              <a:ext uri="{FF2B5EF4-FFF2-40B4-BE49-F238E27FC236}">
-                <a16:creationId xmlns:a16="http://schemas.microsoft.com/office/drawing/2014/main" id="{F885C590-DF02-9A07-C5EB-C0CDA7C3C698}"/>
+          <p:cNvPr id="3" name="流程圖: 換頁接點 2">
+            <a:extLst>
+              <a:ext uri="{FF2B5EF4-FFF2-40B4-BE49-F238E27FC236}">
+                <a16:creationId xmlns:a16="http://schemas.microsoft.com/office/drawing/2014/main" id="{D2ABCB14-69D5-5E21-1A2D-28F7D29E9A66}"/>
               </a:ext>
             </a:extLst>
           </p:cNvPr>
@@ -3335,13 +3340,15 @@
         </p:nvSpPr>
         <p:spPr>
           <a:xfrm>
-            <a:off x="3226902" y="1414671"/>
-            <a:ext cx="1722786" cy="840870"/>
+            <a:off x="4507576" y="3225799"/>
+            <a:ext cx="508001" cy="508001"/>
           </a:xfrm>
-          <a:prstGeom prst="flowChartProcess">
+          <a:prstGeom prst="flowChartOffpageConnector">
             <a:avLst/>
           </a:prstGeom>
-          <a:noFill/>
+          <a:solidFill>
+            <a:schemeClr val="bg1"/>
+          </a:solidFill>
           <a:ln>
             <a:solidFill>
               <a:schemeClr val="tx1"/>
@@ -3369,16 +3376,22 @@
           <a:lstStyle/>
           <a:p>
             <a:pPr algn="ctr"/>
-            <a:endParaRPr lang="zh-TW" altLang="en-US"/>
-          </a:p>
-        </p:txBody>
-      </p:sp>
-      <p:sp>
-        <p:nvSpPr>
-          <p:cNvPr id="5" name="流程圖: 替代程序 4">
-            <a:extLst>
-              <a:ext uri="{FF2B5EF4-FFF2-40B4-BE49-F238E27FC236}">
-                <a16:creationId xmlns:a16="http://schemas.microsoft.com/office/drawing/2014/main" id="{4BC66517-B4BC-9472-1A73-6CD2A4C09097}"/>
+            <a:endParaRPr lang="zh-TW" altLang="en-US" sz="1400">
+              <a:solidFill>
+                <a:schemeClr val="tx1"/>
+              </a:solidFill>
+              <a:latin typeface="Times New Roman" panose="02020603050405020304" pitchFamily="18" charset="0"/>
+              <a:ea typeface="標楷體" panose="03000509000000000000" pitchFamily="65" charset="-120"/>
+            </a:endParaRPr>
+          </a:p>
+        </p:txBody>
+      </p:sp>
+      <p:sp>
+        <p:nvSpPr>
+          <p:cNvPr id="4" name="流程圖: 程序 3">
+            <a:extLst>
+              <a:ext uri="{FF2B5EF4-FFF2-40B4-BE49-F238E27FC236}">
+                <a16:creationId xmlns:a16="http://schemas.microsoft.com/office/drawing/2014/main" id="{F885C590-DF02-9A07-C5EB-C0CDA7C3C698}"/>
               </a:ext>
             </a:extLst>
           </p:cNvPr>
@@ -3390,10 +3403,12 @@
             <a:off x="3226902" y="1414671"/>
             <a:ext cx="1722786" cy="840870"/>
           </a:xfrm>
-          <a:prstGeom prst="flowChartAlternateProcess">
+          <a:prstGeom prst="flowChartProcess">
             <a:avLst/>
           </a:prstGeom>
-          <a:noFill/>
+          <a:solidFill>
+            <a:schemeClr val="bg1"/>
+          </a:solidFill>
           <a:ln>
             <a:solidFill>
               <a:schemeClr val="tx1"/>
@@ -3421,16 +3436,22 @@
           <a:lstStyle/>
           <a:p>
             <a:pPr algn="ctr"/>
-            <a:endParaRPr lang="zh-TW" altLang="en-US"/>
-          </a:p>
-        </p:txBody>
-      </p:sp>
-      <p:sp>
-        <p:nvSpPr>
-          <p:cNvPr id="6" name="流程圖: 決策 5">
-            <a:extLst>
-              <a:ext uri="{FF2B5EF4-FFF2-40B4-BE49-F238E27FC236}">
-                <a16:creationId xmlns:a16="http://schemas.microsoft.com/office/drawing/2014/main" id="{CEF34192-CECE-160A-076D-E01B1E5DCCC3}"/>
+            <a:endParaRPr lang="zh-TW" altLang="en-US" sz="1400">
+              <a:solidFill>
+                <a:schemeClr val="tx1"/>
+              </a:solidFill>
+              <a:latin typeface="Times New Roman" panose="02020603050405020304" pitchFamily="18" charset="0"/>
+              <a:ea typeface="標楷體" panose="03000509000000000000" pitchFamily="65" charset="-120"/>
+            </a:endParaRPr>
+          </a:p>
+        </p:txBody>
+      </p:sp>
+      <p:sp>
+        <p:nvSpPr>
+          <p:cNvPr id="5" name="流程圖: 替代程序 4">
+            <a:extLst>
+              <a:ext uri="{FF2B5EF4-FFF2-40B4-BE49-F238E27FC236}">
+                <a16:creationId xmlns:a16="http://schemas.microsoft.com/office/drawing/2014/main" id="{4BC66517-B4BC-9472-1A73-6CD2A4C09097}"/>
               </a:ext>
             </a:extLst>
           </p:cNvPr>
@@ -3442,10 +3463,12 @@
             <a:off x="3226902" y="1414671"/>
             <a:ext cx="1722786" cy="840870"/>
           </a:xfrm>
-          <a:prstGeom prst="flowChartDecision">
+          <a:prstGeom prst="flowChartAlternateProcess">
             <a:avLst/>
           </a:prstGeom>
-          <a:noFill/>
+          <a:solidFill>
+            <a:schemeClr val="bg1"/>
+          </a:solidFill>
           <a:ln>
             <a:solidFill>
               <a:schemeClr val="tx1"/>
@@ -3473,16 +3496,22 @@
           <a:lstStyle/>
           <a:p>
             <a:pPr algn="ctr"/>
-            <a:endParaRPr lang="zh-TW" altLang="en-US"/>
-          </a:p>
-        </p:txBody>
-      </p:sp>
-      <p:sp>
-        <p:nvSpPr>
-          <p:cNvPr id="7" name="流程圖: 文件 6">
-            <a:extLst>
-              <a:ext uri="{FF2B5EF4-FFF2-40B4-BE49-F238E27FC236}">
-                <a16:creationId xmlns:a16="http://schemas.microsoft.com/office/drawing/2014/main" id="{4F5596B6-4A22-F6A7-E419-94EF118F9730}"/>
+            <a:endParaRPr lang="zh-TW" altLang="en-US" sz="1400">
+              <a:solidFill>
+                <a:schemeClr val="tx1"/>
+              </a:solidFill>
+              <a:latin typeface="Times New Roman" panose="02020603050405020304" pitchFamily="18" charset="0"/>
+              <a:ea typeface="標楷體" panose="03000509000000000000" pitchFamily="65" charset="-120"/>
+            </a:endParaRPr>
+          </a:p>
+        </p:txBody>
+      </p:sp>
+      <p:sp>
+        <p:nvSpPr>
+          <p:cNvPr id="6" name="流程圖: 決策 5">
+            <a:extLst>
+              <a:ext uri="{FF2B5EF4-FFF2-40B4-BE49-F238E27FC236}">
+                <a16:creationId xmlns:a16="http://schemas.microsoft.com/office/drawing/2014/main" id="{CEF34192-CECE-160A-076D-E01B1E5DCCC3}"/>
               </a:ext>
             </a:extLst>
           </p:cNvPr>
@@ -3494,10 +3523,12 @@
             <a:off x="3226902" y="1414671"/>
             <a:ext cx="1722786" cy="840870"/>
           </a:xfrm>
-          <a:prstGeom prst="flowChartDocument">
+          <a:prstGeom prst="flowChartDecision">
             <a:avLst/>
           </a:prstGeom>
-          <a:noFill/>
+          <a:solidFill>
+            <a:schemeClr val="bg1"/>
+          </a:solidFill>
           <a:ln>
             <a:solidFill>
               <a:schemeClr val="tx1"/>
@@ -3525,16 +3556,22 @@
           <a:lstStyle/>
           <a:p>
             <a:pPr algn="ctr"/>
-            <a:endParaRPr lang="zh-TW" altLang="en-US"/>
-          </a:p>
-        </p:txBody>
-      </p:sp>
-      <p:sp>
-        <p:nvSpPr>
-          <p:cNvPr id="8" name="流程圖: 程序 7">
-            <a:extLst>
-              <a:ext uri="{FF2B5EF4-FFF2-40B4-BE49-F238E27FC236}">
-                <a16:creationId xmlns:a16="http://schemas.microsoft.com/office/drawing/2014/main" id="{70078D8D-ADE3-7FD5-BE7A-F3E1844C6F07}"/>
+            <a:endParaRPr lang="zh-TW" altLang="en-US" sz="1400">
+              <a:solidFill>
+                <a:schemeClr val="tx1"/>
+              </a:solidFill>
+              <a:latin typeface="Times New Roman" panose="02020603050405020304" pitchFamily="18" charset="0"/>
+              <a:ea typeface="標楷體" panose="03000509000000000000" pitchFamily="65" charset="-120"/>
+            </a:endParaRPr>
+          </a:p>
+        </p:txBody>
+      </p:sp>
+      <p:sp>
+        <p:nvSpPr>
+          <p:cNvPr id="7" name="流程圖: 文件 6">
+            <a:extLst>
+              <a:ext uri="{FF2B5EF4-FFF2-40B4-BE49-F238E27FC236}">
+                <a16:creationId xmlns:a16="http://schemas.microsoft.com/office/drawing/2014/main" id="{4F5596B6-4A22-F6A7-E419-94EF118F9730}"/>
               </a:ext>
             </a:extLst>
           </p:cNvPr>
@@ -3543,13 +3580,15 @@
         </p:nvSpPr>
         <p:spPr>
           <a:xfrm>
-            <a:off x="7805528" y="1832114"/>
+            <a:off x="3226902" y="1414671"/>
             <a:ext cx="1722786" cy="840870"/>
           </a:xfrm>
-          <a:prstGeom prst="flowChartProcess">
+          <a:prstGeom prst="flowChartDocument">
             <a:avLst/>
           </a:prstGeom>
-          <a:noFill/>
+          <a:solidFill>
+            <a:schemeClr val="bg1"/>
+          </a:solidFill>
           <a:ln>
             <a:solidFill>
               <a:schemeClr val="tx1"/>
@@ -3577,16 +3616,22 @@
           <a:lstStyle/>
           <a:p>
             <a:pPr algn="ctr"/>
-            <a:endParaRPr lang="zh-TW" altLang="en-US"/>
-          </a:p>
-        </p:txBody>
-      </p:sp>
-      <p:sp>
-        <p:nvSpPr>
-          <p:cNvPr id="9" name="流程圖: 替代程序 8">
-            <a:extLst>
-              <a:ext uri="{FF2B5EF4-FFF2-40B4-BE49-F238E27FC236}">
-                <a16:creationId xmlns:a16="http://schemas.microsoft.com/office/drawing/2014/main" id="{D0DAF9B9-9911-0E45-077C-84909AD6F2E8}"/>
+            <a:endParaRPr lang="zh-TW" altLang="en-US" sz="1400">
+              <a:solidFill>
+                <a:schemeClr val="tx1"/>
+              </a:solidFill>
+              <a:latin typeface="Times New Roman" panose="02020603050405020304" pitchFamily="18" charset="0"/>
+              <a:ea typeface="標楷體" panose="03000509000000000000" pitchFamily="65" charset="-120"/>
+            </a:endParaRPr>
+          </a:p>
+        </p:txBody>
+      </p:sp>
+      <p:sp>
+        <p:nvSpPr>
+          <p:cNvPr id="8" name="流程圖: 程序 7">
+            <a:extLst>
+              <a:ext uri="{FF2B5EF4-FFF2-40B4-BE49-F238E27FC236}">
+                <a16:creationId xmlns:a16="http://schemas.microsoft.com/office/drawing/2014/main" id="{70078D8D-ADE3-7FD5-BE7A-F3E1844C6F07}"/>
               </a:ext>
             </a:extLst>
           </p:cNvPr>
@@ -3595,13 +3640,15 @@
         </p:nvSpPr>
         <p:spPr>
           <a:xfrm>
-            <a:off x="7805528" y="390939"/>
+            <a:off x="7767428" y="1835106"/>
             <a:ext cx="1722786" cy="840870"/>
           </a:xfrm>
-          <a:prstGeom prst="flowChartAlternateProcess">
+          <a:prstGeom prst="flowChartProcess">
             <a:avLst/>
           </a:prstGeom>
-          <a:noFill/>
+          <a:solidFill>
+            <a:schemeClr val="bg1"/>
+          </a:solidFill>
           <a:ln>
             <a:solidFill>
               <a:schemeClr val="tx1"/>
@@ -3629,16 +3676,22 @@
           <a:lstStyle/>
           <a:p>
             <a:pPr algn="ctr"/>
-            <a:endParaRPr lang="zh-TW" altLang="en-US"/>
-          </a:p>
-        </p:txBody>
-      </p:sp>
-      <p:sp>
-        <p:nvSpPr>
-          <p:cNvPr id="10" name="流程圖: 決策 9">
-            <a:extLst>
-              <a:ext uri="{FF2B5EF4-FFF2-40B4-BE49-F238E27FC236}">
-                <a16:creationId xmlns:a16="http://schemas.microsoft.com/office/drawing/2014/main" id="{D3128E74-6184-1E0B-A960-EF0DCA37423E}"/>
+            <a:endParaRPr lang="zh-TW" altLang="en-US" sz="1400">
+              <a:solidFill>
+                <a:schemeClr val="tx1"/>
+              </a:solidFill>
+              <a:latin typeface="Times New Roman" panose="02020603050405020304" pitchFamily="18" charset="0"/>
+              <a:ea typeface="標楷體" panose="03000509000000000000" pitchFamily="65" charset="-120"/>
+            </a:endParaRPr>
+          </a:p>
+        </p:txBody>
+      </p:sp>
+      <p:sp>
+        <p:nvSpPr>
+          <p:cNvPr id="9" name="流程圖: 替代程序 8">
+            <a:extLst>
+              <a:ext uri="{FF2B5EF4-FFF2-40B4-BE49-F238E27FC236}">
+                <a16:creationId xmlns:a16="http://schemas.microsoft.com/office/drawing/2014/main" id="{D0DAF9B9-9911-0E45-077C-84909AD6F2E8}"/>
               </a:ext>
             </a:extLst>
           </p:cNvPr>
@@ -3647,13 +3700,15 @@
         </p:nvSpPr>
         <p:spPr>
           <a:xfrm>
-            <a:off x="7878415" y="5158411"/>
+            <a:off x="7767428" y="393931"/>
             <a:ext cx="1722786" cy="840870"/>
           </a:xfrm>
-          <a:prstGeom prst="flowChartDecision">
+          <a:prstGeom prst="flowChartAlternateProcess">
             <a:avLst/>
           </a:prstGeom>
-          <a:noFill/>
+          <a:solidFill>
+            <a:schemeClr val="bg1"/>
+          </a:solidFill>
           <a:ln>
             <a:solidFill>
               <a:schemeClr val="tx1"/>
@@ -3681,16 +3736,22 @@
           <a:lstStyle/>
           <a:p>
             <a:pPr algn="ctr"/>
-            <a:endParaRPr lang="zh-TW" altLang="en-US"/>
-          </a:p>
-        </p:txBody>
-      </p:sp>
-      <p:sp>
-        <p:nvSpPr>
-          <p:cNvPr id="11" name="流程圖: 文件 10">
-            <a:extLst>
-              <a:ext uri="{FF2B5EF4-FFF2-40B4-BE49-F238E27FC236}">
-                <a16:creationId xmlns:a16="http://schemas.microsoft.com/office/drawing/2014/main" id="{A6BE1D3D-0AEA-9CD4-4070-2509F0557210}"/>
+            <a:endParaRPr lang="zh-TW" altLang="en-US" sz="1400" dirty="0">
+              <a:solidFill>
+                <a:schemeClr val="tx1"/>
+              </a:solidFill>
+              <a:latin typeface="Times New Roman" panose="02020603050405020304" pitchFamily="18" charset="0"/>
+              <a:ea typeface="標楷體" panose="03000509000000000000" pitchFamily="65" charset="-120"/>
+            </a:endParaRPr>
+          </a:p>
+        </p:txBody>
+      </p:sp>
+      <p:sp>
+        <p:nvSpPr>
+          <p:cNvPr id="10" name="流程圖: 決策 9">
+            <a:extLst>
+              <a:ext uri="{FF2B5EF4-FFF2-40B4-BE49-F238E27FC236}">
+                <a16:creationId xmlns:a16="http://schemas.microsoft.com/office/drawing/2014/main" id="{D3128E74-6184-1E0B-A960-EF0DCA37423E}"/>
               </a:ext>
             </a:extLst>
           </p:cNvPr>
@@ -3699,13 +3760,15 @@
         </p:nvSpPr>
         <p:spPr>
           <a:xfrm>
-            <a:off x="7878415" y="3448880"/>
+            <a:off x="7878415" y="5158411"/>
             <a:ext cx="1722786" cy="840870"/>
           </a:xfrm>
-          <a:prstGeom prst="flowChartDocument">
+          <a:prstGeom prst="flowChartDecision">
             <a:avLst/>
           </a:prstGeom>
-          <a:noFill/>
+          <a:solidFill>
+            <a:schemeClr val="bg1"/>
+          </a:solidFill>
           <a:ln>
             <a:solidFill>
               <a:schemeClr val="tx1"/>
@@ -3733,7 +3796,134 @@
           <a:lstStyle/>
           <a:p>
             <a:pPr algn="ctr"/>
-            <a:endParaRPr lang="zh-TW" altLang="en-US"/>
+            <a:endParaRPr lang="zh-TW" altLang="en-US" sz="1400">
+              <a:solidFill>
+                <a:schemeClr val="tx1"/>
+              </a:solidFill>
+              <a:latin typeface="Times New Roman" panose="02020603050405020304" pitchFamily="18" charset="0"/>
+              <a:ea typeface="標楷體" panose="03000509000000000000" pitchFamily="65" charset="-120"/>
+            </a:endParaRPr>
+          </a:p>
+        </p:txBody>
+      </p:sp>
+      <p:sp>
+        <p:nvSpPr>
+          <p:cNvPr id="2" name="流程圖: 接點 1">
+            <a:extLst>
+              <a:ext uri="{FF2B5EF4-FFF2-40B4-BE49-F238E27FC236}">
+                <a16:creationId xmlns:a16="http://schemas.microsoft.com/office/drawing/2014/main" id="{8375272D-0454-3B67-A76F-924F93014430}"/>
+              </a:ext>
+            </a:extLst>
+          </p:cNvPr>
+          <p:cNvSpPr/>
+          <p:nvPr/>
+        </p:nvSpPr>
+        <p:spPr>
+          <a:xfrm>
+            <a:off x="3406910" y="3305541"/>
+            <a:ext cx="508001" cy="508001"/>
+          </a:xfrm>
+          <a:prstGeom prst="flowChartConnector">
+            <a:avLst/>
+          </a:prstGeom>
+          <a:solidFill>
+            <a:schemeClr val="bg1"/>
+          </a:solidFill>
+          <a:ln>
+            <a:solidFill>
+              <a:schemeClr val="tx1"/>
+            </a:solidFill>
+          </a:ln>
+        </p:spPr>
+        <p:style>
+          <a:lnRef idx="2">
+            <a:schemeClr val="accent1">
+              <a:shade val="15000"/>
+            </a:schemeClr>
+          </a:lnRef>
+          <a:fillRef idx="1">
+            <a:schemeClr val="accent1"/>
+          </a:fillRef>
+          <a:effectRef idx="0">
+            <a:schemeClr val="accent1"/>
+          </a:effectRef>
+          <a:fontRef idx="minor">
+            <a:schemeClr val="lt1"/>
+          </a:fontRef>
+        </p:style>
+        <p:txBody>
+          <a:bodyPr rtlCol="0" anchor="ctr"/>
+          <a:lstStyle/>
+          <a:p>
+            <a:pPr algn="ctr"/>
+            <a:endParaRPr lang="zh-TW" altLang="en-US" sz="1400">
+              <a:solidFill>
+                <a:schemeClr val="tx1"/>
+              </a:solidFill>
+              <a:latin typeface="Times New Roman" panose="02020603050405020304" pitchFamily="18" charset="0"/>
+              <a:ea typeface="標楷體" panose="03000509000000000000" pitchFamily="65" charset="-120"/>
+            </a:endParaRPr>
+          </a:p>
+        </p:txBody>
+      </p:sp>
+      <p:sp>
+        <p:nvSpPr>
+          <p:cNvPr id="12" name="流程圖: 文件 11">
+            <a:extLst>
+              <a:ext uri="{FF2B5EF4-FFF2-40B4-BE49-F238E27FC236}">
+                <a16:creationId xmlns:a16="http://schemas.microsoft.com/office/drawing/2014/main" id="{E6C57F47-4584-EC46-F76C-27182E8DB609}"/>
+              </a:ext>
+            </a:extLst>
+          </p:cNvPr>
+          <p:cNvSpPr/>
+          <p:nvPr/>
+        </p:nvSpPr>
+        <p:spPr>
+          <a:xfrm>
+            <a:off x="7878415" y="3479799"/>
+            <a:ext cx="1862874" cy="909245"/>
+          </a:xfrm>
+          <a:prstGeom prst="flowChartDocument">
+            <a:avLst/>
+          </a:prstGeom>
+          <a:solidFill>
+            <a:schemeClr val="bg1"/>
+          </a:solidFill>
+          <a:ln>
+            <a:solidFill>
+              <a:schemeClr val="tx1"/>
+            </a:solidFill>
+          </a:ln>
+        </p:spPr>
+        <p:style>
+          <a:lnRef idx="2">
+            <a:schemeClr val="accent1">
+              <a:shade val="15000"/>
+            </a:schemeClr>
+          </a:lnRef>
+          <a:fillRef idx="1">
+            <a:schemeClr val="accent1"/>
+          </a:fillRef>
+          <a:effectRef idx="0">
+            <a:schemeClr val="accent1"/>
+          </a:effectRef>
+          <a:fontRef idx="minor">
+            <a:schemeClr val="lt1"/>
+          </a:fontRef>
+        </p:style>
+        <p:txBody>
+          <a:bodyPr rtlCol="0" anchor="ctr"/>
+          <a:lstStyle/>
+          <a:p>
+            <a:pPr algn="ctr"/>
+            <a:endParaRPr lang="zh-TW" altLang="en-US" sz="1200" dirty="0">
+              <a:solidFill>
+                <a:schemeClr val="tx1"/>
+              </a:solidFill>
+              <a:latin typeface="Times New Roman" panose="02020603050405020304" pitchFamily="18" charset="0"/>
+              <a:ea typeface="標楷體" panose="03000509000000000000" pitchFamily="65" charset="-120"/>
+              <a:cs typeface="Times New Roman" panose="02020603050405020304" pitchFamily="18" charset="0"/>
+            </a:endParaRPr>
           </a:p>
         </p:txBody>
       </p:sp>
